--- a/2.02IntroductionToJavaScript/IntroductionToJavaScript.pptx
+++ b/2.02IntroductionToJavaScript/IntroductionToJavaScript.pptx
@@ -218,7 +218,7 @@
           <a:p>
             <a:fld id="{19104133-B5B0-4351-8158-4F0E5EB1E2BF}" type="datetimeFigureOut">
               <a:rPr lang="en-US" smtClean="0"/>
-              <a:t>2/26/2025</a:t>
+              <a:t>6/8/2026</a:t>
             </a:fld>
             <a:endParaRPr lang="en-US"/>
           </a:p>
@@ -1197,7 +1197,7 @@
             <a:fld id="{1C2D31DE-C454-491C-B5C3-F097855E3DF7}" type="datetime4">
               <a:rPr lang="en-US" smtClean="0"/>
               <a:pPr/>
-              <a:t>February 26, 2025</a:t>
+              <a:t>June 8, 2026</a:t>
             </a:fld>
             <a:endParaRPr lang="en-US" dirty="0"/>
           </a:p>
@@ -4589,7 +4589,7 @@
           <a:p>
             <a:fld id="{5958763E-B898-436D-883D-03711491D54A}" type="datetimeFigureOut">
               <a:rPr lang="en-US" smtClean="0"/>
-              <a:t>2/26/2025</a:t>
+              <a:t>6/8/2026</a:t>
             </a:fld>
             <a:endParaRPr lang="en-US"/>
           </a:p>
@@ -4782,7 +4782,7 @@
           <a:p>
             <a:fld id="{5958763E-B898-436D-883D-03711491D54A}" type="datetimeFigureOut">
               <a:rPr lang="en-US" smtClean="0"/>
-              <a:t>2/26/2025</a:t>
+              <a:t>6/8/2026</a:t>
             </a:fld>
             <a:endParaRPr lang="en-US"/>
           </a:p>
@@ -5032,7 +5032,7 @@
           <a:p>
             <a:fld id="{5958763E-B898-436D-883D-03711491D54A}" type="datetimeFigureOut">
               <a:rPr lang="en-US" smtClean="0"/>
-              <a:t>2/26/2025</a:t>
+              <a:t>6/8/2026</a:t>
             </a:fld>
             <a:endParaRPr lang="en-US"/>
           </a:p>
@@ -5380,7 +5380,7 @@
           <a:p>
             <a:fld id="{5958763E-B898-436D-883D-03711491D54A}" type="datetimeFigureOut">
               <a:rPr lang="en-US" smtClean="0"/>
-              <a:t>2/26/2025</a:t>
+              <a:t>6/8/2026</a:t>
             </a:fld>
             <a:endParaRPr lang="en-US"/>
           </a:p>
@@ -5796,7 +5796,7 @@
           <a:p>
             <a:fld id="{5958763E-B898-436D-883D-03711491D54A}" type="datetimeFigureOut">
               <a:rPr lang="en-US" smtClean="0"/>
-              <a:t>2/26/2025</a:t>
+              <a:t>6/8/2026</a:t>
             </a:fld>
             <a:endParaRPr lang="en-US"/>
           </a:p>
@@ -6297,7 +6297,7 @@
           <a:p>
             <a:fld id="{5958763E-B898-436D-883D-03711491D54A}" type="datetimeFigureOut">
               <a:rPr lang="en-US" smtClean="0"/>
-              <a:t>2/26/2025</a:t>
+              <a:t>6/8/2026</a:t>
             </a:fld>
             <a:endParaRPr lang="en-US"/>
           </a:p>
@@ -6748,7 +6748,7 @@
           <a:p>
             <a:fld id="{5958763E-B898-436D-883D-03711491D54A}" type="datetimeFigureOut">
               <a:rPr lang="en-US" smtClean="0"/>
-              <a:t>2/26/2025</a:t>
+              <a:t>6/8/2026</a:t>
             </a:fld>
             <a:endParaRPr lang="en-US"/>
           </a:p>
@@ -7359,7 +7359,7 @@
           <a:p>
             <a:fld id="{5958763E-B898-436D-883D-03711491D54A}" type="datetimeFigureOut">
               <a:rPr lang="en-US" smtClean="0"/>
-              <a:t>2/26/2025</a:t>
+              <a:t>6/8/2026</a:t>
             </a:fld>
             <a:endParaRPr lang="en-US"/>
           </a:p>
@@ -8130,7 +8130,7 @@
           <a:p>
             <a:fld id="{5958763E-B898-436D-883D-03711491D54A}" type="datetimeFigureOut">
               <a:rPr lang="en-US" smtClean="0"/>
-              <a:t>2/26/2025</a:t>
+              <a:t>6/8/2026</a:t>
             </a:fld>
             <a:endParaRPr lang="en-US"/>
           </a:p>
@@ -8234,7 +8234,7 @@
           <a:p>
             <a:fld id="{5958763E-B898-436D-883D-03711491D54A}" type="datetimeFigureOut">
               <a:rPr lang="en-US" smtClean="0"/>
-              <a:t>2/26/2025</a:t>
+              <a:t>6/8/2026</a:t>
             </a:fld>
             <a:endParaRPr lang="en-US"/>
           </a:p>
@@ -8561,7 +8561,7 @@
             <a:fld id="{1C2D31DE-C454-491C-B5C3-F097855E3DF7}" type="datetime4">
               <a:rPr lang="en-US" smtClean="0"/>
               <a:pPr/>
-              <a:t>February 26, 2025</a:t>
+              <a:t>June 8, 2026</a:t>
             </a:fld>
             <a:endParaRPr lang="en-US" dirty="0"/>
           </a:p>
@@ -11713,7 +11713,7 @@
           <a:p>
             <a:fld id="{5958763E-B898-436D-883D-03711491D54A}" type="datetimeFigureOut">
               <a:rPr lang="en-US" smtClean="0"/>
-              <a:t>2/26/2025</a:t>
+              <a:t>6/8/2026</a:t>
             </a:fld>
             <a:endParaRPr lang="en-US"/>
           </a:p>
@@ -11837,7 +11837,7 @@
           <a:p>
             <a:fld id="{5958763E-B898-436D-883D-03711491D54A}" type="datetimeFigureOut">
               <a:rPr lang="en-US" smtClean="0"/>
-              <a:t>2/26/2025</a:t>
+              <a:t>6/8/2026</a:t>
             </a:fld>
             <a:endParaRPr lang="en-US"/>
           </a:p>
@@ -11961,7 +11961,7 @@
           <a:p>
             <a:fld id="{5958763E-B898-436D-883D-03711491D54A}" type="datetimeFigureOut">
               <a:rPr lang="en-US" smtClean="0"/>
-              <a:t>2/26/2025</a:t>
+              <a:t>6/8/2026</a:t>
             </a:fld>
             <a:endParaRPr lang="en-US"/>
           </a:p>
@@ -12085,7 +12085,7 @@
           <a:p>
             <a:fld id="{5958763E-B898-436D-883D-03711491D54A}" type="datetimeFigureOut">
               <a:rPr lang="en-US" smtClean="0"/>
-              <a:t>2/26/2025</a:t>
+              <a:t>6/8/2026</a:t>
             </a:fld>
             <a:endParaRPr lang="en-US"/>
           </a:p>
@@ -12209,7 +12209,7 @@
           <a:p>
             <a:fld id="{5958763E-B898-436D-883D-03711491D54A}" type="datetimeFigureOut">
               <a:rPr lang="en-US" smtClean="0"/>
-              <a:t>2/26/2025</a:t>
+              <a:t>6/8/2026</a:t>
             </a:fld>
             <a:endParaRPr lang="en-US"/>
           </a:p>
@@ -12333,7 +12333,7 @@
           <a:p>
             <a:fld id="{5958763E-B898-436D-883D-03711491D54A}" type="datetimeFigureOut">
               <a:rPr lang="en-US" smtClean="0"/>
-              <a:t>2/26/2025</a:t>
+              <a:t>6/8/2026</a:t>
             </a:fld>
             <a:endParaRPr lang="en-US"/>
           </a:p>
@@ -12457,7 +12457,7 @@
           <a:p>
             <a:fld id="{5958763E-B898-436D-883D-03711491D54A}" type="datetimeFigureOut">
               <a:rPr lang="en-US" smtClean="0"/>
-              <a:t>2/26/2025</a:t>
+              <a:t>6/8/2026</a:t>
             </a:fld>
             <a:endParaRPr lang="en-US"/>
           </a:p>
@@ -12581,7 +12581,7 @@
           <a:p>
             <a:fld id="{5958763E-B898-436D-883D-03711491D54A}" type="datetimeFigureOut">
               <a:rPr lang="en-US" smtClean="0"/>
-              <a:t>2/26/2025</a:t>
+              <a:t>6/8/2026</a:t>
             </a:fld>
             <a:endParaRPr lang="en-US"/>
           </a:p>
@@ -12714,7 +12714,7 @@
           <a:p>
             <a:fld id="{5958763E-B898-436D-883D-03711491D54A}" type="datetimeFigureOut">
               <a:rPr lang="en-US" smtClean="0"/>
-              <a:t>2/26/2025</a:t>
+              <a:t>6/8/2026</a:t>
             </a:fld>
             <a:endParaRPr lang="en-US"/>
           </a:p>
@@ -16053,7 +16053,7 @@
             <a:fld id="{1C2D31DE-C454-491C-B5C3-F097855E3DF7}" type="datetime4">
               <a:rPr lang="en-US" smtClean="0"/>
               <a:pPr/>
-              <a:t>February 26, 2025</a:t>
+              <a:t>June 8, 2026</a:t>
             </a:fld>
             <a:endParaRPr lang="en-US" dirty="0"/>
           </a:p>
@@ -28289,7 +28289,7 @@
           <a:p>
             <a:fld id="{5958763E-B898-436D-883D-03711491D54A}" type="datetimeFigureOut">
               <a:rPr lang="en-US" smtClean="0"/>
-              <a:t>2/26/2025</a:t>
+              <a:t>6/8/2026</a:t>
             </a:fld>
             <a:endParaRPr lang="en-US"/>
           </a:p>
@@ -28691,7 +28691,7 @@
           <a:p>
             <a:fld id="{5958763E-B898-436D-883D-03711491D54A}" type="datetimeFigureOut">
               <a:rPr lang="en-US" smtClean="0"/>
-              <a:t>2/26/2025</a:t>
+              <a:t>6/8/2026</a:t>
             </a:fld>
             <a:endParaRPr lang="en-US"/>
           </a:p>
@@ -28985,7 +28985,7 @@
           <a:p>
             <a:fld id="{5958763E-B898-436D-883D-03711491D54A}" type="datetimeFigureOut">
               <a:rPr lang="en-US" smtClean="0"/>
-              <a:t>2/26/2025</a:t>
+              <a:t>6/8/2026</a:t>
             </a:fld>
             <a:endParaRPr lang="en-US"/>
           </a:p>
@@ -29186,7 +29186,7 @@
           <a:p>
             <a:fld id="{5958763E-B898-436D-883D-03711491D54A}" type="datetimeFigureOut">
               <a:rPr lang="en-US" smtClean="0"/>
-              <a:t>2/26/2025</a:t>
+              <a:t>6/8/2026</a:t>
             </a:fld>
             <a:endParaRPr lang="en-US"/>
           </a:p>
@@ -29447,7 +29447,7 @@
           <a:p>
             <a:fld id="{5958763E-B898-436D-883D-03711491D54A}" type="datetimeFigureOut">
               <a:rPr lang="en-US" smtClean="0"/>
-              <a:t>2/26/2025</a:t>
+              <a:t>6/8/2026</a:t>
             </a:fld>
             <a:endParaRPr lang="en-US"/>
           </a:p>
@@ -29955,7 +29955,7 @@
           <a:p>
             <a:fld id="{5958763E-B898-436D-883D-03711491D54A}" type="datetimeFigureOut">
               <a:rPr lang="en-US" smtClean="0"/>
-              <a:t>2/26/2025</a:t>
+              <a:t>6/8/2026</a:t>
             </a:fld>
             <a:endParaRPr lang="en-US"/>
           </a:p>
@@ -30434,7 +30434,7 @@
           <a:p>
             <a:fld id="{5958763E-B898-436D-883D-03711491D54A}" type="datetimeFigureOut">
               <a:rPr lang="en-US" smtClean="0"/>
-              <a:t>2/26/2025</a:t>
+              <a:t>6/8/2026</a:t>
             </a:fld>
             <a:endParaRPr lang="en-US"/>
           </a:p>
@@ -31253,7 +31253,7 @@
           <a:p>
             <a:fld id="{5958763E-B898-436D-883D-03711491D54A}" type="datetimeFigureOut">
               <a:rPr lang="en-US" smtClean="0"/>
-              <a:t>2/26/2025</a:t>
+              <a:t>6/8/2026</a:t>
             </a:fld>
             <a:endParaRPr lang="en-US"/>
           </a:p>
@@ -31454,7 +31454,7 @@
           <a:p>
             <a:fld id="{5958763E-B898-436D-883D-03711491D54A}" type="datetimeFigureOut">
               <a:rPr lang="en-US" smtClean="0"/>
-              <a:t>2/26/2025</a:t>
+              <a:t>6/8/2026</a:t>
             </a:fld>
             <a:endParaRPr lang="en-US"/>
           </a:p>
@@ -31789,7 +31789,7 @@
           <a:p>
             <a:fld id="{5958763E-B898-436D-883D-03711491D54A}" type="datetimeFigureOut">
               <a:rPr lang="en-US" smtClean="0"/>
-              <a:t>2/26/2025</a:t>
+              <a:t>6/8/2026</a:t>
             </a:fld>
             <a:endParaRPr lang="en-US"/>
           </a:p>
@@ -32019,7 +32019,7 @@
           <a:p>
             <a:fld id="{5958763E-B898-436D-883D-03711491D54A}" type="datetimeFigureOut">
               <a:rPr lang="en-US" smtClean="0"/>
-              <a:t>2/26/2025</a:t>
+              <a:t>6/8/2026</a:t>
             </a:fld>
             <a:endParaRPr lang="en-US"/>
           </a:p>
@@ -32263,7 +32263,7 @@
           <a:p>
             <a:fld id="{5958763E-B898-436D-883D-03711491D54A}" type="datetimeFigureOut">
               <a:rPr lang="en-US" smtClean="0"/>
-              <a:t>2/26/2025</a:t>
+              <a:t>6/8/2026</a:t>
             </a:fld>
             <a:endParaRPr lang="en-US"/>
           </a:p>
@@ -32811,7 +32811,7 @@
         <p:spPr>
           <a:xfrm>
             <a:off x="381000" y="3429000"/>
-            <a:ext cx="4883068" cy="553998"/>
+            <a:ext cx="5859489" cy="553998"/>
           </a:xfrm>
         </p:spPr>
         <p:txBody>
@@ -32819,9 +32819,10 @@
           <a:lstStyle/>
           <a:p>
             <a:r>
-              <a:rPr lang="en-US" dirty="0"/>
-              <a:t>Hy-Tech Club: Web 102</a:t>
+              <a:rPr lang="en-US"/>
+              <a:t>HTO: Website Development</a:t>
             </a:r>
+            <a:endParaRPr lang="en-US" dirty="0"/>
           </a:p>
         </p:txBody>
       </p:sp>
